--- a/docs/posts/isaac/index.pptx
+++ b/docs/posts/isaac/index.pptx
@@ -26,6 +26,9 @@
     <p:sldId id="274" r:id="rId20"/>
     <p:sldId id="275" r:id="rId21"/>
     <p:sldId id="276" r:id="rId22"/>
+    <p:sldId id="277" r:id="rId23"/>
+    <p:sldId id="278" r:id="rId24"/>
+    <p:sldId id="279" r:id="rId25"/>
   </p:sldIdLst>
   <p:sldSz cx="9144000" cy="5143500" type="screen16x9"/>
   <p:notesSz cx="6858000" cy="9144000"/>
@@ -4809,62 +4812,201 @@
             </a:pPr>
             <a:r>
               <a:rPr/>
-              <a:t>Plan B - Carpentry</a:t>
-            </a:r>
-          </a:p>
-        </p:txBody>
-      </p:sp>
-      <p:sp>
-        <p:nvSpPr>
-          <p:cNvPr id="3" name="Content Placeholder 2"/>
-          <p:cNvSpPr>
-            <a:spLocks noGrp="1"/>
-          </p:cNvSpPr>
+              <a:t>Plan A Budget Overview</a:t>
+            </a:r>
+          </a:p>
+        </p:txBody>
+      </p:sp>
+      <p:graphicFrame>
+        <p:nvGraphicFramePr>
+          <p:cNvPr id="6" name="Content Placeholder 5"/>
+          <p:cNvGraphicFramePr>
+            <a:graphicFrameLocks noGrp="1"/>
+          </p:cNvGraphicFramePr>
           <p:nvPr>
             <p:ph idx="1"/>
           </p:nvPr>
-        </p:nvSpPr>
-        <p:spPr/>
-        <p:txBody>
-          <a:bodyPr/>
-          <a:lstStyle/>
-          <a:p>
-            <a:pPr lvl="0"/>
-            <a:r>
-              <a:rPr/>
-              <a:t>wide variety of individual trades</a:t>
-            </a:r>
-          </a:p>
-          <a:p>
-            <a:pPr lvl="0"/>
-            <a:r>
-              <a:rPr/>
-              <a:t>physically demanding</a:t>
-            </a:r>
-          </a:p>
-          <a:p>
-            <a:pPr lvl="0"/>
-            <a:r>
-              <a:rPr/>
-              <a:t>requires skill with hand tools</a:t>
-            </a:r>
-          </a:p>
-          <a:p>
-            <a:pPr lvl="0"/>
-            <a:r>
-              <a:rPr/>
-              <a:t>job sites vary, and are outside</a:t>
-            </a:r>
-          </a:p>
-          <a:p>
-            <a:pPr lvl="0"/>
-            <a:r>
-              <a:rPr/>
-              <a:t>requires heavy lifting, use of dangerous tools, and PPE</a:t>
-            </a:r>
-          </a:p>
-        </p:txBody>
-      </p:sp>
+        </p:nvGraphicFramePr>
+        <p:xfrm>
+          <a:off x="457200" y="1193800"/>
+          <a:ext cx="8229600" cy="3390900"/>
+        </p:xfrm>
+        <a:graphic>
+          <a:graphicData uri="http://schemas.openxmlformats.org/drawingml/2006/table">
+            <a:tbl>
+              <a:tblPr firstRow="1" bandRow="1">
+                <a:tableStyleId>{5C22544A-7EE6-4342-B048-85BDC9FD1C3A}</a:tableStyleId>
+              </a:tblPr>
+              <a:tblGrid>
+                <a:gridCol w="4114800"/>
+                <a:gridCol w="4114800"/>
+              </a:tblGrid>
+              <a:tr h="0">
+                <a:tc>
+                  <a:txBody>
+                    <a:bodyPr/>
+                    <a:lstStyle/>
+                    <a:p>
+                      <a:pPr lvl="0" indent="0" marL="0">
+                        <a:buNone/>
+                      </a:pPr>
+                      <a:r>
+                        <a:rPr/>
+                        <a:t>Item</a:t>
+                      </a:r>
+                    </a:p>
+                  </a:txBody>
+                  <a:tcPr/>
+                </a:tc>
+                <a:tc>
+                  <a:txBody>
+                    <a:bodyPr/>
+                    <a:lstStyle/>
+                    <a:p>
+                      <a:pPr lvl="0" indent="0" marL="0">
+                        <a:buNone/>
+                      </a:pPr>
+                      <a:r>
+                        <a:rPr/>
+                        <a:t>Amount</a:t>
+                      </a:r>
+                    </a:p>
+                  </a:txBody>
+                  <a:tcPr/>
+                </a:tc>
+              </a:tr>
+              <a:tr h="0">
+                <a:tc>
+                  <a:txBody>
+                    <a:bodyPr/>
+                    <a:lstStyle/>
+                    <a:p>
+                      <a:pPr lvl="0" indent="0" marL="0">
+                        <a:buNone/>
+                      </a:pPr>
+                      <a:r>
+                        <a:rPr/>
+                        <a:t>Income</a:t>
+                      </a:r>
+                    </a:p>
+                  </a:txBody>
+                </a:tc>
+                <a:tc>
+                  <a:txBody>
+                    <a:bodyPr/>
+                    <a:lstStyle/>
+                    <a:p>
+                      <a:pPr lvl="0" indent="0" marL="0">
+                        <a:buNone/>
+                      </a:pPr>
+                      <a:r>
+                        <a:rPr/>
+                        <a:t>NA</a:t>
+                      </a:r>
+                    </a:p>
+                  </a:txBody>
+                </a:tc>
+              </a:tr>
+              <a:tr h="0">
+                <a:tc>
+                  <a:txBody>
+                    <a:bodyPr/>
+                    <a:lstStyle/>
+                    <a:p>
+                      <a:pPr lvl="0" indent="0" marL="0">
+                        <a:buNone/>
+                      </a:pPr>
+                      <a:r>
+                        <a:rPr/>
+                        <a:t>School</a:t>
+                      </a:r>
+                    </a:p>
+                  </a:txBody>
+                </a:tc>
+                <a:tc>
+                  <a:txBody>
+                    <a:bodyPr/>
+                    <a:lstStyle/>
+                    <a:p>
+                      <a:pPr lvl="0" indent="0" marL="0">
+                        <a:buNone/>
+                      </a:pPr>
+                      <a:r>
+                        <a:rPr/>
+                        <a:t>NA</a:t>
+                      </a:r>
+                    </a:p>
+                  </a:txBody>
+                </a:tc>
+              </a:tr>
+              <a:tr h="0">
+                <a:tc>
+                  <a:txBody>
+                    <a:bodyPr/>
+                    <a:lstStyle/>
+                    <a:p>
+                      <a:pPr lvl="0" indent="0" marL="0">
+                        <a:buNone/>
+                      </a:pPr>
+                      <a:r>
+                        <a:rPr/>
+                        <a:t>Other</a:t>
+                      </a:r>
+                    </a:p>
+                  </a:txBody>
+                </a:tc>
+                <a:tc>
+                  <a:txBody>
+                    <a:bodyPr/>
+                    <a:lstStyle/>
+                    <a:p>
+                      <a:pPr lvl="0" indent="0" marL="0">
+                        <a:buNone/>
+                      </a:pPr>
+                      <a:r>
+                        <a:rPr/>
+                        <a:t>NA</a:t>
+                      </a:r>
+                    </a:p>
+                  </a:txBody>
+                </a:tc>
+              </a:tr>
+              <a:tr h="0">
+                <a:tc>
+                  <a:txBody>
+                    <a:bodyPr/>
+                    <a:lstStyle/>
+                    <a:p>
+                      <a:pPr lvl="0" indent="0" marL="0">
+                        <a:buNone/>
+                      </a:pPr>
+                      <a:r>
+                        <a:rPr/>
+                        <a:t>Total</a:t>
+                      </a:r>
+                    </a:p>
+                  </a:txBody>
+                </a:tc>
+                <a:tc>
+                  <a:txBody>
+                    <a:bodyPr/>
+                    <a:lstStyle/>
+                    <a:p>
+                      <a:pPr lvl="0" indent="0" marL="0">
+                        <a:buNone/>
+                      </a:pPr>
+                      <a:r>
+                        <a:rPr/>
+                        <a:t>NA</a:t>
+                      </a:r>
+                    </a:p>
+                  </a:txBody>
+                </a:tc>
+              </a:tr>
+            </a:tbl>
+          </a:graphicData>
+        </a:graphic>
+      </p:graphicFrame>
     </p:spTree>
   </p:cSld>
 </p:sld>
@@ -4907,7 +5049,105 @@
             </a:pPr>
             <a:r>
               <a:rPr/>
-              <a:t>Work/Volunteer (Mentor) Experience</a:t>
+              <a:t>Plan B - Carpentry</a:t>
+            </a:r>
+          </a:p>
+        </p:txBody>
+      </p:sp>
+      <p:sp>
+        <p:nvSpPr>
+          <p:cNvPr id="3" name="Content Placeholder 2"/>
+          <p:cNvSpPr>
+            <a:spLocks noGrp="1"/>
+          </p:cNvSpPr>
+          <p:nvPr>
+            <p:ph idx="1"/>
+          </p:nvPr>
+        </p:nvSpPr>
+        <p:spPr/>
+        <p:txBody>
+          <a:bodyPr/>
+          <a:lstStyle/>
+          <a:p>
+            <a:pPr lvl="0"/>
+            <a:r>
+              <a:rPr/>
+              <a:t>wide variety of individual trades</a:t>
+            </a:r>
+          </a:p>
+          <a:p>
+            <a:pPr lvl="0"/>
+            <a:r>
+              <a:rPr/>
+              <a:t>physically demanding</a:t>
+            </a:r>
+          </a:p>
+          <a:p>
+            <a:pPr lvl="0"/>
+            <a:r>
+              <a:rPr/>
+              <a:t>requires skill with hand tools</a:t>
+            </a:r>
+          </a:p>
+          <a:p>
+            <a:pPr lvl="0"/>
+            <a:r>
+              <a:rPr/>
+              <a:t>job sites vary, and are outside</a:t>
+            </a:r>
+          </a:p>
+          <a:p>
+            <a:pPr lvl="0"/>
+            <a:r>
+              <a:rPr/>
+              <a:t>requires heavy lifting, use of dangerous tools, and PPE</a:t>
+            </a:r>
+          </a:p>
+        </p:txBody>
+      </p:sp>
+    </p:spTree>
+  </p:cSld>
+</p:sld>
+</file>
+
+<file path=ppt/slides/slide22.xml><?xml version="1.0" encoding="utf-8"?>
+<p:sld xmlns:a="http://schemas.openxmlformats.org/drawingml/2006/main" xmlns:r="http://schemas.openxmlformats.org/officeDocument/2006/relationships" xmlns:p="http://schemas.openxmlformats.org/presentationml/2006/main">
+  <p:cSld>
+    <p:spTree>
+      <p:nvGrpSpPr>
+        <p:cNvPr id="1" name=""/>
+        <p:cNvGrpSpPr/>
+        <p:nvPr/>
+      </p:nvGrpSpPr>
+      <p:grpSpPr>
+        <a:xfrm>
+          <a:off x="0" y="0"/>
+          <a:ext cx="0" cy="0"/>
+          <a:chOff x="0" y="0"/>
+          <a:chExt cx="0" cy="0"/>
+        </a:xfrm>
+      </p:grpSpPr>
+      <p:sp>
+        <p:nvSpPr>
+          <p:cNvPr id="2" name="Title 1"/>
+          <p:cNvSpPr>
+            <a:spLocks noGrp="1"/>
+          </p:cNvSpPr>
+          <p:nvPr>
+            <p:ph type="title"/>
+          </p:nvPr>
+        </p:nvSpPr>
+        <p:spPr/>
+        <p:txBody>
+          <a:bodyPr/>
+          <a:lstStyle/>
+          <a:p>
+            <a:pPr lvl="0" indent="0" marL="0">
+              <a:buNone/>
+            </a:pPr>
+            <a:r>
+              <a:rPr/>
+              <a:t>Plan B - Carpentry</a:t>
             </a:r>
           </a:p>
         </p:txBody>
@@ -4935,7 +5175,215 @@
             </a:pPr>
             <a:r>
               <a:rPr b="1"/>
-              <a:t>Make sure that you have completed the Mentorship ( Work Experience - 30 Hours) assignment.</a:t>
+              <a:t>Educational Pathway</a:t>
+            </a:r>
+          </a:p>
+          <a:p>
+            <a:pPr lvl="0"/>
+            <a:r>
+              <a:rPr/>
+              <a:t>high number of entry-level jobs</a:t>
+            </a:r>
+          </a:p>
+          <a:p>
+            <a:pPr lvl="0"/>
+            <a:r>
+              <a:rPr/>
+              <a:t>many apprenticeship pathways allow students to work while going to school</a:t>
+            </a:r>
+          </a:p>
+          <a:p>
+            <a:pPr lvl="0"/>
+            <a:r>
+              <a:rPr/>
+              <a:t>significant investment from Government of Canada in trades</a:t>
+            </a:r>
+          </a:p>
+        </p:txBody>
+      </p:sp>
+    </p:spTree>
+  </p:cSld>
+</p:sld>
+</file>
+
+<file path=ppt/slides/slide23.xml><?xml version="1.0" encoding="utf-8"?>
+<p:sld xmlns:a="http://schemas.openxmlformats.org/drawingml/2006/main" xmlns:r="http://schemas.openxmlformats.org/officeDocument/2006/relationships" xmlns:p="http://schemas.openxmlformats.org/presentationml/2006/main">
+  <p:cSld>
+    <p:spTree>
+      <p:nvGrpSpPr>
+        <p:cNvPr id="1" name=""/>
+        <p:cNvGrpSpPr/>
+        <p:nvPr/>
+      </p:nvGrpSpPr>
+      <p:grpSpPr>
+        <a:xfrm>
+          <a:off x="0" y="0"/>
+          <a:ext cx="0" cy="0"/>
+          <a:chOff x="0" y="0"/>
+          <a:chExt cx="0" cy="0"/>
+        </a:xfrm>
+      </p:grpSpPr>
+      <p:sp>
+        <p:nvSpPr>
+          <p:cNvPr id="2" name="Title 1"/>
+          <p:cNvSpPr>
+            <a:spLocks noGrp="1"/>
+          </p:cNvSpPr>
+          <p:nvPr>
+            <p:ph type="title"/>
+          </p:nvPr>
+        </p:nvSpPr>
+        <p:spPr/>
+        <p:txBody>
+          <a:bodyPr/>
+          <a:lstStyle/>
+          <a:p>
+            <a:pPr lvl="0" indent="0" marL="0">
+              <a:buNone/>
+            </a:pPr>
+            <a:r>
+              <a:rPr/>
+              <a:t>Plan B - Carpentry</a:t>
+            </a:r>
+          </a:p>
+        </p:txBody>
+      </p:sp>
+      <p:sp>
+        <p:nvSpPr>
+          <p:cNvPr id="3" name="Content Placeholder 2"/>
+          <p:cNvSpPr>
+            <a:spLocks noGrp="1"/>
+          </p:cNvSpPr>
+          <p:nvPr>
+            <p:ph idx="1"/>
+          </p:nvPr>
+        </p:nvSpPr>
+        <p:spPr/>
+        <p:txBody>
+          <a:bodyPr/>
+          <a:lstStyle/>
+          <a:p>
+            <a:pPr lvl="0" indent="0" marL="0">
+              <a:spcBef>
+                <a:spcPts val="3000"/>
+              </a:spcBef>
+              <a:buNone/>
+            </a:pPr>
+            <a:r>
+              <a:rPr b="1"/>
+              <a:t>Why this plan B?</a:t>
+            </a:r>
+          </a:p>
+          <a:p>
+            <a:pPr lvl="0"/>
+            <a:r>
+              <a:rPr/>
+              <a:t>love working with my hands</a:t>
+            </a:r>
+          </a:p>
+          <a:p>
+            <a:pPr lvl="0"/>
+            <a:r>
+              <a:rPr/>
+              <a:t>many memories of working with my Grandpa</a:t>
+            </a:r>
+          </a:p>
+          <a:p>
+            <a:pPr lvl="0"/>
+            <a:r>
+              <a:rPr/>
+              <a:t>easy to start, could start after high school</a:t>
+            </a:r>
+          </a:p>
+          <a:p>
+            <a:pPr lvl="0"/>
+            <a:r>
+              <a:rPr/>
+              <a:t>$77,800 starting wage (Indeed)</a:t>
+            </a:r>
+          </a:p>
+          <a:p>
+            <a:pPr lvl="0"/>
+            <a:r>
+              <a:rPr/>
+              <a:t>flexibility</a:t>
+            </a:r>
+          </a:p>
+        </p:txBody>
+      </p:sp>
+    </p:spTree>
+  </p:cSld>
+</p:sld>
+</file>
+
+<file path=ppt/slides/slide24.xml><?xml version="1.0" encoding="utf-8"?>
+<p:sld xmlns:a="http://schemas.openxmlformats.org/drawingml/2006/main" xmlns:r="http://schemas.openxmlformats.org/officeDocument/2006/relationships" xmlns:p="http://schemas.openxmlformats.org/presentationml/2006/main">
+  <p:cSld>
+    <p:spTree>
+      <p:nvGrpSpPr>
+        <p:cNvPr id="1" name=""/>
+        <p:cNvGrpSpPr/>
+        <p:nvPr/>
+      </p:nvGrpSpPr>
+      <p:grpSpPr>
+        <a:xfrm>
+          <a:off x="0" y="0"/>
+          <a:ext cx="0" cy="0"/>
+          <a:chOff x="0" y="0"/>
+          <a:chExt cx="0" cy="0"/>
+        </a:xfrm>
+      </p:grpSpPr>
+      <p:sp>
+        <p:nvSpPr>
+          <p:cNvPr id="2" name="Title 1"/>
+          <p:cNvSpPr>
+            <a:spLocks noGrp="1"/>
+          </p:cNvSpPr>
+          <p:nvPr>
+            <p:ph type="title"/>
+          </p:nvPr>
+        </p:nvSpPr>
+        <p:spPr/>
+        <p:txBody>
+          <a:bodyPr/>
+          <a:lstStyle/>
+          <a:p>
+            <a:pPr lvl="0" indent="0" marL="0">
+              <a:buNone/>
+            </a:pPr>
+            <a:r>
+              <a:rPr/>
+              <a:t>Work/Volunteer (Mentor) Experience</a:t>
+            </a:r>
+          </a:p>
+        </p:txBody>
+      </p:sp>
+      <p:sp>
+        <p:nvSpPr>
+          <p:cNvPr id="3" name="Content Placeholder 2"/>
+          <p:cNvSpPr>
+            <a:spLocks noGrp="1"/>
+          </p:cNvSpPr>
+          <p:nvPr>
+            <p:ph idx="1"/>
+          </p:nvPr>
+        </p:nvSpPr>
+        <p:spPr/>
+        <p:txBody>
+          <a:bodyPr/>
+          <a:lstStyle/>
+          <a:p>
+            <a:pPr lvl="0"/>
+            <a:r>
+              <a:rPr/>
+              <a:t>XX hours</a:t>
+            </a:r>
+          </a:p>
+          <a:p>
+            <a:pPr lvl="0"/>
+            <a:r>
+              <a:rPr/>
+              <a:t>documentation is submitted</a:t>
             </a:r>
           </a:p>
         </p:txBody>
